--- a/sih/INGRES-SIH2026-Idea.pptx
+++ b/sih/INGRES-SIH2026-Idea.pptx
@@ -10310,8 +10310,8 @@
         </p:nvSpPr>
         <p:spPr>
           <a:xfrm>
-            <a:off x="6766560" y="1417320"/>
-            <a:ext cx="4937760" cy="3794760"/>
+            <a:off x="6766560" y="1280160"/>
+            <a:ext cx="4937760" cy="4617720"/>
           </a:xfrm>
           <a:prstGeom prst="rect">
             <a:avLst/>
@@ -10354,8 +10354,8 @@
         </p:nvSpPr>
         <p:spPr>
           <a:xfrm>
-            <a:off x="6903720" y="1527048"/>
-            <a:ext cx="4663440" cy="179451"/>
+            <a:off x="6931152" y="1399031"/>
+            <a:ext cx="4608576" cy="179451"/>
           </a:xfrm>
           <a:prstGeom prst="rect">
             <a:avLst/>
@@ -10388,16 +10388,40 @@
           </a:p>
         </p:txBody>
       </p:sp>
-      <p:sp>
-        <p:nvSpPr>
-          <p:cNvPr id="17413" name="Oval 17412"/>
+      <p:pic>
+        <p:nvPicPr>
+          <p:cNvPr id="17413" name="Picture 17412" descr="punjab.png"/>
+          <p:cNvPicPr>
+            <a:picLocks noChangeAspect="1"/>
+          </p:cNvPicPr>
+          <p:nvPr/>
+        </p:nvPicPr>
+        <p:blipFill>
+          <a:blip r:embed="rId4"/>
+          <a:stretch>
+            <a:fillRect/>
+          </a:stretch>
+        </p:blipFill>
+        <p:spPr>
+          <a:xfrm>
+            <a:off x="7741409" y="1609344"/>
+            <a:ext cx="2988061" cy="3310128"/>
+          </a:xfrm>
+          <a:prstGeom prst="rect">
+            <a:avLst/>
+          </a:prstGeom>
+        </p:spPr>
+      </p:pic>
+      <p:sp>
+        <p:nvSpPr>
+          <p:cNvPr id="17414" name="Oval 17413"/>
           <p:cNvSpPr/>
           <p:nvPr/>
         </p:nvSpPr>
         <p:spPr>
           <a:xfrm>
-            <a:off x="8344293" y="2504983"/>
-            <a:ext cx="155448" cy="155448"/>
+            <a:off x="8697250" y="2428792"/>
+            <a:ext cx="141732" cy="141732"/>
           </a:xfrm>
           <a:prstGeom prst="ellipse">
             <a:avLst/>
@@ -10436,14 +10460,14 @@
       </p:sp>
       <p:sp>
         <p:nvSpPr>
-          <p:cNvPr id="17414" name="Oval 17413"/>
+          <p:cNvPr id="17415" name="Oval 17414"/>
           <p:cNvSpPr/>
           <p:nvPr/>
         </p:nvSpPr>
         <p:spPr>
           <a:xfrm>
-            <a:off x="9211004" y="3848028"/>
-            <a:ext cx="155448" cy="155448"/>
+            <a:off x="9224293" y="3861324"/>
+            <a:ext cx="141732" cy="141732"/>
           </a:xfrm>
           <a:prstGeom prst="ellipse">
             <a:avLst/>
@@ -10482,14 +10506,14 @@
       </p:sp>
       <p:sp>
         <p:nvSpPr>
-          <p:cNvPr id="17415" name="Oval 17414"/>
+          <p:cNvPr id="17416" name="Oval 17415"/>
           <p:cNvSpPr/>
           <p:nvPr/>
         </p:nvSpPr>
         <p:spPr>
           <a:xfrm>
-            <a:off x="8513348" y="4036356"/>
-            <a:ext cx="155448" cy="155448"/>
+            <a:off x="8800051" y="4062200"/>
+            <a:ext cx="141732" cy="141732"/>
           </a:xfrm>
           <a:prstGeom prst="ellipse">
             <a:avLst/>
@@ -10528,14 +10552,14 @@
       </p:sp>
       <p:sp>
         <p:nvSpPr>
-          <p:cNvPr id="17416" name="Oval 17415"/>
+          <p:cNvPr id="17417" name="Oval 17416"/>
           <p:cNvSpPr/>
           <p:nvPr/>
         </p:nvSpPr>
         <p:spPr>
           <a:xfrm>
-            <a:off x="8108934" y="3609282"/>
-            <a:ext cx="155448" cy="155448"/>
+            <a:off x="8554128" y="3606671"/>
+            <a:ext cx="141732" cy="141732"/>
           </a:xfrm>
           <a:prstGeom prst="ellipse">
             <a:avLst/>
@@ -10574,14 +10598,14 @@
       </p:sp>
       <p:sp>
         <p:nvSpPr>
-          <p:cNvPr id="17417" name="Oval 17416"/>
+          <p:cNvPr id="17418" name="Oval 17417"/>
           <p:cNvSpPr/>
           <p:nvPr/>
         </p:nvSpPr>
         <p:spPr>
           <a:xfrm>
-            <a:off x="10612902" y="3589930"/>
-            <a:ext cx="155448" cy="155448"/>
+            <a:off x="10076780" y="3586029"/>
+            <a:ext cx="141732" cy="141732"/>
           </a:xfrm>
           <a:prstGeom prst="ellipse">
             <a:avLst/>
@@ -10620,14 +10644,14 @@
       </p:sp>
       <p:sp>
         <p:nvSpPr>
-          <p:cNvPr id="17418" name="Oval 17417"/>
+          <p:cNvPr id="17419" name="Oval 17418"/>
           <p:cNvSpPr/>
           <p:nvPr/>
         </p:nvSpPr>
         <p:spPr>
           <a:xfrm>
-            <a:off x="7269480" y="3871454"/>
-            <a:ext cx="155448" cy="155448"/>
+            <a:off x="8043660" y="3886311"/>
+            <a:ext cx="141732" cy="141732"/>
           </a:xfrm>
           <a:prstGeom prst="ellipse">
             <a:avLst/>
@@ -10666,14 +10690,14 @@
       </p:sp>
       <p:sp>
         <p:nvSpPr>
-          <p:cNvPr id="17419" name="Oval 17418"/>
+          <p:cNvPr id="17420" name="Oval 17419"/>
           <p:cNvSpPr/>
           <p:nvPr/>
         </p:nvSpPr>
         <p:spPr>
           <a:xfrm>
-            <a:off x="8080145" y="3315638"/>
-            <a:ext cx="155448" cy="155448"/>
+            <a:off x="8536622" y="3293460"/>
+            <a:ext cx="141732" cy="141732"/>
           </a:xfrm>
           <a:prstGeom prst="ellipse">
             <a:avLst/>
@@ -10712,14 +10736,14 @@
       </p:sp>
       <p:sp>
         <p:nvSpPr>
-          <p:cNvPr id="17420" name="Oval 17419"/>
+          <p:cNvPr id="17421" name="Oval 17420"/>
           <p:cNvSpPr/>
           <p:nvPr/>
         </p:nvSpPr>
         <p:spPr>
           <a:xfrm>
-            <a:off x="8905205" y="2310747"/>
-            <a:ext cx="155448" cy="155448"/>
+            <a:off x="9038338" y="2221614"/>
+            <a:ext cx="141732" cy="141732"/>
           </a:xfrm>
           <a:prstGeom prst="ellipse">
             <a:avLst/>
@@ -10758,14 +10782,14 @@
       </p:sp>
       <p:sp>
         <p:nvSpPr>
-          <p:cNvPr id="17421" name="Oval 17420"/>
+          <p:cNvPr id="17422" name="Oval 17421"/>
           <p:cNvSpPr/>
           <p:nvPr/>
         </p:nvSpPr>
         <p:spPr>
           <a:xfrm>
-            <a:off x="9726284" y="2567419"/>
-            <a:ext cx="155448" cy="155448"/>
+            <a:off x="9537632" y="2495388"/>
+            <a:ext cx="141732" cy="141732"/>
           </a:xfrm>
           <a:prstGeom prst="ellipse">
             <a:avLst/>
@@ -10804,14 +10828,14 @@
       </p:sp>
       <p:sp>
         <p:nvSpPr>
-          <p:cNvPr id="17422" name="Oval 17421"/>
+          <p:cNvPr id="17423" name="Oval 17422"/>
           <p:cNvSpPr/>
           <p:nvPr/>
         </p:nvSpPr>
         <p:spPr>
           <a:xfrm>
-            <a:off x="9391544" y="3001520"/>
-            <a:ext cx="155448" cy="155448"/>
+            <a:off x="9334078" y="2958414"/>
+            <a:ext cx="141732" cy="141732"/>
           </a:xfrm>
           <a:prstGeom prst="ellipse">
             <a:avLst/>
@@ -10850,14 +10874,14 @@
       </p:sp>
       <p:sp>
         <p:nvSpPr>
-          <p:cNvPr id="17423" name="Oval 17422"/>
+          <p:cNvPr id="17424" name="Oval 17423"/>
           <p:cNvSpPr/>
           <p:nvPr/>
         </p:nvSpPr>
         <p:spPr>
           <a:xfrm>
-            <a:off x="9140565" y="2844258"/>
-            <a:ext cx="155448" cy="155448"/>
+            <a:off x="9181459" y="2790673"/>
+            <a:ext cx="141732" cy="141732"/>
           </a:xfrm>
           <a:prstGeom prst="ellipse">
             <a:avLst/>
@@ -10896,14 +10920,14 @@
       </p:sp>
       <p:sp>
         <p:nvSpPr>
-          <p:cNvPr id="17424" name="Oval 17423"/>
+          <p:cNvPr id="17425" name="Oval 17424"/>
           <p:cNvSpPr/>
           <p:nvPr/>
         </p:nvSpPr>
         <p:spPr>
           <a:xfrm>
-            <a:off x="9773448" y="3416269"/>
-            <a:ext cx="155448" cy="155448"/>
+            <a:off x="9566312" y="3400797"/>
+            <a:ext cx="141732" cy="141732"/>
           </a:xfrm>
           <a:prstGeom prst="ellipse">
             <a:avLst/>
@@ -10942,14 +10966,14 @@
       </p:sp>
       <p:sp>
         <p:nvSpPr>
-          <p:cNvPr id="17425" name="Oval 17424"/>
+          <p:cNvPr id="17426" name="Oval 17425"/>
           <p:cNvSpPr/>
           <p:nvPr/>
         </p:nvSpPr>
         <p:spPr>
           <a:xfrm>
-            <a:off x="9096770" y="4325112"/>
-            <a:ext cx="155448" cy="155448"/>
+            <a:off x="9154827" y="4370195"/>
+            <a:ext cx="141732" cy="141732"/>
           </a:xfrm>
           <a:prstGeom prst="ellipse">
             <a:avLst/>
@@ -10988,14 +11012,14 @@
       </p:sp>
       <p:sp>
         <p:nvSpPr>
-          <p:cNvPr id="17426" name="Oval 17425"/>
+          <p:cNvPr id="17427" name="Oval 17426"/>
           <p:cNvSpPr/>
           <p:nvPr/>
         </p:nvSpPr>
         <p:spPr>
           <a:xfrm>
-            <a:off x="8683628" y="3484104"/>
-            <a:ext cx="155448" cy="155448"/>
+            <a:off x="8903597" y="3473152"/>
+            <a:ext cx="141732" cy="141732"/>
           </a:xfrm>
           <a:prstGeom prst="ellipse">
             <a:avLst/>
@@ -11034,14 +11058,14 @@
       </p:sp>
       <p:sp>
         <p:nvSpPr>
-          <p:cNvPr id="17427" name="Oval 17426"/>
+          <p:cNvPr id="17428" name="Oval 17427"/>
           <p:cNvSpPr/>
           <p:nvPr/>
         </p:nvSpPr>
         <p:spPr>
           <a:xfrm>
-            <a:off x="7778175" y="3924520"/>
-            <a:ext cx="155448" cy="155448"/>
+            <a:off x="8352995" y="3942913"/>
+            <a:ext cx="141732" cy="141732"/>
           </a:xfrm>
           <a:prstGeom prst="ellipse">
             <a:avLst/>
@@ -11080,14 +11104,14 @@
       </p:sp>
       <p:sp>
         <p:nvSpPr>
-          <p:cNvPr id="17428" name="Oval 17427"/>
+          <p:cNvPr id="17429" name="Oval 17428"/>
           <p:cNvSpPr/>
           <p:nvPr/>
         </p:nvSpPr>
         <p:spPr>
           <a:xfrm>
-            <a:off x="9361224" y="1920240"/>
-            <a:ext cx="155448" cy="155448"/>
+            <a:off x="9315641" y="1805087"/>
+            <a:ext cx="141732" cy="141732"/>
           </a:xfrm>
           <a:prstGeom prst="ellipse">
             <a:avLst/>
@@ -11126,14 +11150,14 @@
       </p:sp>
       <p:sp>
         <p:nvSpPr>
-          <p:cNvPr id="17429" name="Oval 17428"/>
+          <p:cNvPr id="17430" name="Oval 17429"/>
           <p:cNvSpPr/>
           <p:nvPr/>
         </p:nvSpPr>
         <p:spPr>
           <a:xfrm>
-            <a:off x="10650419" y="3923807"/>
-            <a:ext cx="155448" cy="155448"/>
+            <a:off x="10099594" y="3942152"/>
+            <a:ext cx="141732" cy="141732"/>
           </a:xfrm>
           <a:prstGeom prst="ellipse">
             <a:avLst/>
@@ -11172,14 +11196,14 @@
       </p:sp>
       <p:sp>
         <p:nvSpPr>
-          <p:cNvPr id="17430" name="Oval 17429"/>
+          <p:cNvPr id="17431" name="Oval 17430"/>
           <p:cNvSpPr/>
           <p:nvPr/>
         </p:nvSpPr>
         <p:spPr>
           <a:xfrm>
-            <a:off x="10726677" y="3214599"/>
-            <a:ext cx="155448" cy="155448"/>
+            <a:off x="10145966" y="3185689"/>
+            <a:ext cx="141732" cy="141732"/>
           </a:xfrm>
           <a:prstGeom prst="ellipse">
             <a:avLst/>
@@ -11218,14 +11242,14 @@
       </p:sp>
       <p:sp>
         <p:nvSpPr>
-          <p:cNvPr id="17431" name="Oval 17430"/>
+          <p:cNvPr id="17432" name="Oval 17431"/>
           <p:cNvSpPr/>
           <p:nvPr/>
         </p:nvSpPr>
         <p:spPr>
           <a:xfrm>
-            <a:off x="11045952" y="3611116"/>
-            <a:ext cx="155448" cy="155448"/>
+            <a:off x="10340115" y="3608626"/>
+            <a:ext cx="141732" cy="141732"/>
           </a:xfrm>
           <a:prstGeom prst="ellipse">
             <a:avLst/>
@@ -11264,14 +11288,14 @@
       </p:sp>
       <p:sp>
         <p:nvSpPr>
-          <p:cNvPr id="17432" name="Oval 17431"/>
+          <p:cNvPr id="17433" name="Oval 17432"/>
           <p:cNvSpPr/>
           <p:nvPr/>
         </p:nvSpPr>
         <p:spPr>
           <a:xfrm>
-            <a:off x="9818774" y="3988688"/>
-            <a:ext cx="155448" cy="155448"/>
+            <a:off x="9593875" y="4011356"/>
+            <a:ext cx="141732" cy="141732"/>
           </a:xfrm>
           <a:prstGeom prst="ellipse">
             <a:avLst/>
@@ -11310,14 +11334,14 @@
       </p:sp>
       <p:sp>
         <p:nvSpPr>
-          <p:cNvPr id="17433" name="Oval 17432"/>
+          <p:cNvPr id="17434" name="Oval 17433"/>
           <p:cNvSpPr/>
           <p:nvPr/>
         </p:nvSpPr>
         <p:spPr>
           <a:xfrm>
-            <a:off x="10211397" y="3120384"/>
-            <a:ext cx="155448" cy="155448"/>
+            <a:off x="9832627" y="3085197"/>
+            <a:ext cx="141732" cy="141732"/>
           </a:xfrm>
           <a:prstGeom prst="ellipse">
             <a:avLst/>
@@ -11356,14 +11380,14 @@
       </p:sp>
       <p:sp>
         <p:nvSpPr>
-          <p:cNvPr id="17434" name="Oval 17433"/>
+          <p:cNvPr id="17435" name="Oval 17434"/>
           <p:cNvSpPr/>
           <p:nvPr/>
         </p:nvSpPr>
         <p:spPr>
           <a:xfrm>
-            <a:off x="8219034" y="2861777"/>
-            <a:ext cx="155448" cy="155448"/>
+            <a:off x="8621080" y="2809359"/>
+            <a:ext cx="141732" cy="141732"/>
           </a:xfrm>
           <a:prstGeom prst="ellipse">
             <a:avLst/>
@@ -11402,13 +11426,139 @@
       </p:sp>
       <p:sp>
         <p:nvSpPr>
-          <p:cNvPr id="17435" name="Oval 17434"/>
+          <p:cNvPr id="17436" name="TextBox 17435"/>
+          <p:cNvSpPr txBox="1"/>
+          <p:nvPr/>
+        </p:nvSpPr>
+        <p:spPr>
+          <a:xfrm>
+            <a:off x="7456158" y="4021185"/>
+            <a:ext cx="1371600" cy="147701"/>
+          </a:xfrm>
+          <a:prstGeom prst="rect">
+            <a:avLst/>
+          </a:prstGeom>
+          <a:noFill/>
+        </p:spPr>
+        <p:txBody>
+          <a:bodyPr wrap="square" lIns="0" rIns="0" tIns="0" bIns="0">
+            <a:spAutoFit/>
+          </a:bodyPr>
+          <a:lstStyle/>
+          <a:p>
+            <a:pPr algn="ctr">
+              <a:spcBef>
+                <a:spcPts val="0"/>
+              </a:spcBef>
+              <a:spcAft>
+                <a:spcPts val="200"/>
+              </a:spcAft>
+            </a:pPr>
+            <a:r>
+              <a:rPr sz="700" b="1">
+                <a:solidFill>
+                  <a:srgbClr val="0B2C34"/>
+                </a:solidFill>
+                <a:latin typeface="Calibri"/>
+              </a:rPr>
+              <a:t>Fazilka</a:t>
+            </a:r>
+          </a:p>
+        </p:txBody>
+      </p:sp>
+      <p:sp>
+        <p:nvSpPr>
+          <p:cNvPr id="17437" name="TextBox 17436"/>
+          <p:cNvSpPr txBox="1"/>
+          <p:nvPr/>
+        </p:nvSpPr>
+        <p:spPr>
+          <a:xfrm>
+            <a:off x="7765493" y="4077787"/>
+            <a:ext cx="1371600" cy="147701"/>
+          </a:xfrm>
+          <a:prstGeom prst="rect">
+            <a:avLst/>
+          </a:prstGeom>
+          <a:noFill/>
+        </p:spPr>
+        <p:txBody>
+          <a:bodyPr wrap="square" lIns="0" rIns="0" tIns="0" bIns="0">
+            <a:spAutoFit/>
+          </a:bodyPr>
+          <a:lstStyle/>
+          <a:p>
+            <a:pPr algn="ctr">
+              <a:spcBef>
+                <a:spcPts val="0"/>
+              </a:spcBef>
+              <a:spcAft>
+                <a:spcPts val="200"/>
+              </a:spcAft>
+            </a:pPr>
+            <a:r>
+              <a:rPr sz="700" b="1">
+                <a:solidFill>
+                  <a:srgbClr val="0B2C34"/>
+                </a:solidFill>
+                <a:latin typeface="Calibri"/>
+              </a:rPr>
+              <a:t>Muktsar</a:t>
+            </a:r>
+          </a:p>
+        </p:txBody>
+      </p:sp>
+      <p:sp>
+        <p:nvSpPr>
+          <p:cNvPr id="17438" name="TextBox 17437"/>
+          <p:cNvSpPr txBox="1"/>
+          <p:nvPr/>
+        </p:nvSpPr>
+        <p:spPr>
+          <a:xfrm>
+            <a:off x="8728139" y="1939961"/>
+            <a:ext cx="1371600" cy="147701"/>
+          </a:xfrm>
+          <a:prstGeom prst="rect">
+            <a:avLst/>
+          </a:prstGeom>
+          <a:noFill/>
+        </p:spPr>
+        <p:txBody>
+          <a:bodyPr wrap="square" lIns="0" rIns="0" tIns="0" bIns="0">
+            <a:spAutoFit/>
+          </a:bodyPr>
+          <a:lstStyle/>
+          <a:p>
+            <a:pPr algn="ctr">
+              <a:spcBef>
+                <a:spcPts val="0"/>
+              </a:spcBef>
+              <a:spcAft>
+                <a:spcPts val="200"/>
+              </a:spcAft>
+            </a:pPr>
+            <a:r>
+              <a:rPr sz="700" b="1">
+                <a:solidFill>
+                  <a:srgbClr val="0B2C34"/>
+                </a:solidFill>
+                <a:latin typeface="Calibri"/>
+              </a:rPr>
+              <a:t>Pathankot</a:t>
+            </a:r>
+          </a:p>
+        </p:txBody>
+      </p:sp>
+      <p:sp>
+        <p:nvSpPr>
+          <p:cNvPr id="17439" name="Oval 17438"/>
           <p:cNvSpPr/>
           <p:nvPr/>
         </p:nvSpPr>
         <p:spPr>
           <a:xfrm>
-            <a:off x="7040880" y="4645152"/>
+            <a:off x="7040880" y="5056631"/>
             <a:ext cx="118872" cy="118872"/>
           </a:xfrm>
           <a:prstGeom prst="ellipse">
@@ -11446,14 +11596,14 @@
       </p:sp>
       <p:sp>
         <p:nvSpPr>
-          <p:cNvPr id="17436" name="TextBox 17435"/>
+          <p:cNvPr id="17440" name="TextBox 17439"/>
           <p:cNvSpPr txBox="1"/>
           <p:nvPr/>
         </p:nvSpPr>
         <p:spPr>
           <a:xfrm>
-            <a:off x="7205472" y="4617720"/>
-            <a:ext cx="1828800" cy="179451"/>
+            <a:off x="7223760" y="5024627"/>
+            <a:ext cx="2011680" cy="179451"/>
           </a:xfrm>
           <a:prstGeom prst="rect">
             <a:avLst/>
@@ -11481,20 +11631,20 @@
                 </a:solidFill>
                 <a:latin typeface="Calibri"/>
               </a:rPr>
-              <a:t>Over-exploited — 20 districts</a:t>
-            </a:r>
-          </a:p>
-        </p:txBody>
-      </p:sp>
-      <p:sp>
-        <p:nvSpPr>
-          <p:cNvPr id="17437" name="Oval 17436"/>
+              <a:t>Over-exploited — 20</a:t>
+            </a:r>
+          </a:p>
+        </p:txBody>
+      </p:sp>
+      <p:sp>
+        <p:nvSpPr>
+          <p:cNvPr id="17441" name="Oval 17440"/>
           <p:cNvSpPr/>
           <p:nvPr/>
         </p:nvSpPr>
         <p:spPr>
           <a:xfrm>
-            <a:off x="9189720" y="4645152"/>
+            <a:off x="9326880" y="5056631"/>
             <a:ext cx="118872" cy="118872"/>
           </a:xfrm>
           <a:prstGeom prst="ellipse">
@@ -11532,14 +11682,14 @@
       </p:sp>
       <p:sp>
         <p:nvSpPr>
-          <p:cNvPr id="17438" name="TextBox 17437"/>
+          <p:cNvPr id="17442" name="TextBox 17441"/>
           <p:cNvSpPr txBox="1"/>
           <p:nvPr/>
         </p:nvSpPr>
         <p:spPr>
           <a:xfrm>
-            <a:off x="9354312" y="4617720"/>
-            <a:ext cx="1828800" cy="179451"/>
+            <a:off x="9509760" y="5024627"/>
+            <a:ext cx="2011680" cy="179451"/>
           </a:xfrm>
           <a:prstGeom prst="rect">
             <a:avLst/>
@@ -11567,21 +11717,65 @@
                 </a:solidFill>
                 <a:latin typeface="Calibri"/>
               </a:rPr>
-              <a:t>Safe — 3 districts</a:t>
-            </a:r>
-          </a:p>
-        </p:txBody>
-      </p:sp>
-      <p:sp>
-        <p:nvSpPr>
-          <p:cNvPr id="17439" name="TextBox 17438"/>
+              <a:t>Safe — 3</a:t>
+            </a:r>
+          </a:p>
+        </p:txBody>
+      </p:sp>
+      <p:sp>
+        <p:nvSpPr>
+          <p:cNvPr id="17443" name="Oval 17442"/>
+          <p:cNvSpPr/>
+          <p:nvPr/>
+        </p:nvSpPr>
+        <p:spPr>
+          <a:xfrm>
+            <a:off x="7040880" y="5294375"/>
+            <a:ext cx="82296" cy="82296"/>
+          </a:xfrm>
+          <a:prstGeom prst="ellipse">
+            <a:avLst/>
+          </a:prstGeom>
+          <a:solidFill>
+            <a:srgbClr val="607A80"/>
+          </a:solidFill>
+          <a:ln>
+            <a:noFill/>
+          </a:ln>
+          <a:effectLst/>
+        </p:spPr>
+        <p:style>
+          <a:lnRef idx="1">
+            <a:schemeClr val="accent1"/>
+          </a:lnRef>
+          <a:fillRef idx="3">
+            <a:schemeClr val="accent1"/>
+          </a:fillRef>
+          <a:effectRef idx="2">
+            <a:schemeClr val="accent1"/>
+          </a:effectRef>
+          <a:fontRef idx="minor">
+            <a:schemeClr val="lt1"/>
+          </a:fontRef>
+        </p:style>
+        <p:txBody>
+          <a:bodyPr rtlCol="0" anchor="ctr" wrap="square" lIns="36576" rIns="36576" tIns="18288" bIns="18288"/>
+          <a:lstStyle/>
+          <a:p>
+            <a:pPr algn="ctr"/>
+          </a:p>
+        </p:txBody>
+      </p:sp>
+      <p:sp>
+        <p:nvSpPr>
+          <p:cNvPr id="17444" name="TextBox 17443"/>
           <p:cNvSpPr txBox="1"/>
           <p:nvPr/>
         </p:nvSpPr>
         <p:spPr>
           <a:xfrm>
-            <a:off x="7040880" y="4882896"/>
-            <a:ext cx="4389120" cy="274701"/>
+            <a:off x="7223760" y="5248655"/>
+            <a:ext cx="4206240" cy="171513"/>
           </a:xfrm>
           <a:prstGeom prst="rect">
             <a:avLst/>
@@ -11603,13 +11797,55 @@
               </a:spcAft>
             </a:pPr>
             <a:r>
+              <a:rPr sz="850" b="0">
+                <a:solidFill>
+                  <a:srgbClr val="5C5752"/>
+                </a:solidFill>
+                <a:latin typeface="Calibri"/>
+              </a:rPr>
+              <a:t>1,606 monitoring stations — the outline is their own coverage</a:t>
+            </a:r>
+          </a:p>
+        </p:txBody>
+      </p:sp>
+      <p:sp>
+        <p:nvSpPr>
+          <p:cNvPr id="17445" name="TextBox 17444"/>
+          <p:cNvSpPr txBox="1"/>
+          <p:nvPr/>
+        </p:nvSpPr>
+        <p:spPr>
+          <a:xfrm>
+            <a:off x="7040880" y="5541264"/>
+            <a:ext cx="4389120" cy="274701"/>
+          </a:xfrm>
+          <a:prstGeom prst="rect">
+            <a:avLst/>
+          </a:prstGeom>
+          <a:noFill/>
+        </p:spPr>
+        <p:txBody>
+          <a:bodyPr wrap="square" lIns="0" rIns="0" tIns="0" bIns="0">
+            <a:spAutoFit/>
+          </a:bodyPr>
+          <a:lstStyle/>
+          <a:p>
+            <a:pPr algn="l">
+              <a:spcBef>
+                <a:spcPts val="0"/>
+              </a:spcBef>
+              <a:spcAft>
+                <a:spcPts val="200"/>
+              </a:spcAft>
+            </a:pPr>
+            <a:r>
               <a:rPr sz="750" b="0">
                 <a:solidFill>
                   <a:srgbClr val="5C5752"/>
                 </a:solidFill>
                 <a:latin typeface="Calibri"/>
               </a:rPr>
-              <a:t>Each dot is a district, placed by the mean coordinate of its monitoring stations. Malerkotla is categorised but has no stations, so it is named rather than plotted.</a:t>
+              <a:t>Malerkotla is categorised by CGWB but has no monitoring stations, so it is named here rather than plotted.</a:t>
             </a:r>
           </a:p>
         </p:txBody>
